--- a/ゲーム科1年/00_前期/ゲームプログラミングⅡ/04_シューティングゲームのサンプル解説.pptx
+++ b/ゲーム科1年/00_前期/ゲームプログラミングⅡ/04_シューティングゲームのサンプル解説.pptx
@@ -260,7 +260,7 @@
           <a:p>
             <a:fld id="{E9CC885B-4903-4D54-9A93-00025F12DED9}" type="datetimeFigureOut">
               <a:rPr kumimoji="1" lang="ja-JP" altLang="en-US" smtClean="0"/>
-              <a:t>2024/9/13</a:t>
+              <a:t>2026/5/20</a:t>
             </a:fld>
             <a:endParaRPr kumimoji="1" lang="ja-JP" altLang="en-US"/>
           </a:p>
@@ -490,7 +490,7 @@
           <a:p>
             <a:fld id="{E9CC885B-4903-4D54-9A93-00025F12DED9}" type="datetimeFigureOut">
               <a:rPr kumimoji="1" lang="ja-JP" altLang="en-US" smtClean="0"/>
-              <a:t>2024/9/13</a:t>
+              <a:t>2026/5/20</a:t>
             </a:fld>
             <a:endParaRPr kumimoji="1" lang="ja-JP" altLang="en-US"/>
           </a:p>
@@ -730,7 +730,7 @@
           <a:p>
             <a:fld id="{E9CC885B-4903-4D54-9A93-00025F12DED9}" type="datetimeFigureOut">
               <a:rPr kumimoji="1" lang="ja-JP" altLang="en-US" smtClean="0"/>
-              <a:t>2024/9/13</a:t>
+              <a:t>2026/5/20</a:t>
             </a:fld>
             <a:endParaRPr kumimoji="1" lang="ja-JP" altLang="en-US"/>
           </a:p>
@@ -960,7 +960,7 @@
           <a:p>
             <a:fld id="{E9CC885B-4903-4D54-9A93-00025F12DED9}" type="datetimeFigureOut">
               <a:rPr kumimoji="1" lang="ja-JP" altLang="en-US" smtClean="0"/>
-              <a:t>2024/9/13</a:t>
+              <a:t>2026/5/20</a:t>
             </a:fld>
             <a:endParaRPr kumimoji="1" lang="ja-JP" altLang="en-US"/>
           </a:p>
@@ -1235,7 +1235,7 @@
           <a:p>
             <a:fld id="{E9CC885B-4903-4D54-9A93-00025F12DED9}" type="datetimeFigureOut">
               <a:rPr kumimoji="1" lang="ja-JP" altLang="en-US" smtClean="0"/>
-              <a:t>2024/9/13</a:t>
+              <a:t>2026/5/20</a:t>
             </a:fld>
             <a:endParaRPr kumimoji="1" lang="ja-JP" altLang="en-US"/>
           </a:p>
@@ -1564,7 +1564,7 @@
           <a:p>
             <a:fld id="{E9CC885B-4903-4D54-9A93-00025F12DED9}" type="datetimeFigureOut">
               <a:rPr kumimoji="1" lang="ja-JP" altLang="en-US" smtClean="0"/>
-              <a:t>2024/9/13</a:t>
+              <a:t>2026/5/20</a:t>
             </a:fld>
             <a:endParaRPr kumimoji="1" lang="ja-JP" altLang="en-US"/>
           </a:p>
@@ -2040,7 +2040,7 @@
           <a:p>
             <a:fld id="{E9CC885B-4903-4D54-9A93-00025F12DED9}" type="datetimeFigureOut">
               <a:rPr kumimoji="1" lang="ja-JP" altLang="en-US" smtClean="0"/>
-              <a:t>2024/9/13</a:t>
+              <a:t>2026/5/20</a:t>
             </a:fld>
             <a:endParaRPr kumimoji="1" lang="ja-JP" altLang="en-US"/>
           </a:p>
@@ -2181,7 +2181,7 @@
           <a:p>
             <a:fld id="{E9CC885B-4903-4D54-9A93-00025F12DED9}" type="datetimeFigureOut">
               <a:rPr kumimoji="1" lang="ja-JP" altLang="en-US" smtClean="0"/>
-              <a:t>2024/9/13</a:t>
+              <a:t>2026/5/20</a:t>
             </a:fld>
             <a:endParaRPr kumimoji="1" lang="ja-JP" altLang="en-US"/>
           </a:p>
@@ -2294,7 +2294,7 @@
           <a:p>
             <a:fld id="{E9CC885B-4903-4D54-9A93-00025F12DED9}" type="datetimeFigureOut">
               <a:rPr kumimoji="1" lang="ja-JP" altLang="en-US" smtClean="0"/>
-              <a:t>2024/9/13</a:t>
+              <a:t>2026/5/20</a:t>
             </a:fld>
             <a:endParaRPr kumimoji="1" lang="ja-JP" altLang="en-US"/>
           </a:p>
@@ -2637,7 +2637,7 @@
           <a:p>
             <a:fld id="{E9CC885B-4903-4D54-9A93-00025F12DED9}" type="datetimeFigureOut">
               <a:rPr kumimoji="1" lang="ja-JP" altLang="en-US" smtClean="0"/>
-              <a:t>2024/9/13</a:t>
+              <a:t>2026/5/20</a:t>
             </a:fld>
             <a:endParaRPr kumimoji="1" lang="ja-JP" altLang="en-US"/>
           </a:p>
@@ -2925,7 +2925,7 @@
           <a:p>
             <a:fld id="{E9CC885B-4903-4D54-9A93-00025F12DED9}" type="datetimeFigureOut">
               <a:rPr kumimoji="1" lang="ja-JP" altLang="en-US" smtClean="0"/>
-              <a:t>2024/9/13</a:t>
+              <a:t>2026/5/20</a:t>
             </a:fld>
             <a:endParaRPr kumimoji="1" lang="ja-JP" altLang="en-US"/>
           </a:p>
@@ -3198,7 +3198,7 @@
           <a:p>
             <a:fld id="{E9CC885B-4903-4D54-9A93-00025F12DED9}" type="datetimeFigureOut">
               <a:rPr kumimoji="1" lang="ja-JP" altLang="en-US" smtClean="0"/>
-              <a:t>2024/9/13</a:t>
+              <a:t>2026/5/20</a:t>
             </a:fld>
             <a:endParaRPr kumimoji="1" lang="ja-JP" altLang="en-US"/>
           </a:p>
@@ -3855,7 +3855,7 @@
         <p:spPr>
           <a:xfrm>
             <a:off x="567542" y="1216429"/>
-            <a:ext cx="10341293" cy="2308324"/>
+            <a:ext cx="10341293" cy="3046988"/>
           </a:xfrm>
           <a:prstGeom prst="rect">
             <a:avLst/>
@@ -3894,11 +3894,7 @@
           <a:p>
             <a:r>
               <a:rPr lang="ja-JP" altLang="en-US" sz="2400" dirty="0"/>
-              <a:t>わからない部分はサンプルを参考に</a:t>
-            </a:r>
-            <a:r>
-              <a:rPr lang="ja-JP" altLang="en-US" sz="2400"/>
-              <a:t>したり、先生に質問したり、</a:t>
+              <a:t>わからない部分はサンプルを参考にしたり、先生に質問したり、</a:t>
             </a:r>
             <a:endParaRPr lang="en-US" altLang="ja-JP" sz="2400" dirty="0"/>
           </a:p>
@@ -3908,6 +3904,56 @@
               <a:t>過去のスライドを見直したりしましょう。</a:t>
             </a:r>
             <a:endParaRPr lang="en-US" altLang="ja-JP" sz="2400" dirty="0"/>
+          </a:p>
+          <a:p>
+            <a:endParaRPr lang="en-US" altLang="ja-JP" sz="2400" dirty="0"/>
+          </a:p>
+          <a:p>
+            <a:r>
+              <a:rPr lang="en-US" altLang="ja-JP" sz="2400" b="1" dirty="0">
+                <a:solidFill>
+                  <a:srgbClr val="FF0000"/>
+                </a:solidFill>
+              </a:rPr>
+              <a:t>※</a:t>
+            </a:r>
+            <a:r>
+              <a:rPr lang="en-US" altLang="ja-JP" sz="2400" b="1" dirty="0" err="1">
+                <a:solidFill>
+                  <a:srgbClr val="FF0000"/>
+                </a:solidFill>
+              </a:rPr>
+              <a:t>ChatGPT</a:t>
+            </a:r>
+            <a:r>
+              <a:rPr lang="ja-JP" altLang="en-US" sz="2400" b="1" dirty="0">
+                <a:solidFill>
+                  <a:srgbClr val="FF0000"/>
+                </a:solidFill>
+              </a:rPr>
+              <a:t>など</a:t>
+            </a:r>
+            <a:r>
+              <a:rPr lang="en-US" altLang="ja-JP" sz="2400" b="1" dirty="0">
+                <a:solidFill>
+                  <a:srgbClr val="FF0000"/>
+                </a:solidFill>
+              </a:rPr>
+              <a:t>AI</a:t>
+            </a:r>
+            <a:r>
+              <a:rPr lang="ja-JP" altLang="en-US" sz="2400" b="1" dirty="0">
+                <a:solidFill>
+                  <a:srgbClr val="FF0000"/>
+                </a:solidFill>
+              </a:rPr>
+              <a:t>には頼らないこと！！</a:t>
+            </a:r>
+            <a:endParaRPr lang="en-US" altLang="ja-JP" sz="2400" b="1" dirty="0">
+              <a:solidFill>
+                <a:srgbClr val="FF0000"/>
+              </a:solidFill>
+            </a:endParaRPr>
           </a:p>
         </p:txBody>
       </p:sp>

--- a/ゲーム科1年/00_前期/ゲームプログラミングⅡ/04_シューティングゲームのサンプル解説.pptx
+++ b/ゲーム科1年/00_前期/ゲームプログラミングⅡ/04_シューティングゲームのサンプル解説.pptx
@@ -260,7 +260,7 @@
           <a:p>
             <a:fld id="{E9CC885B-4903-4D54-9A93-00025F12DED9}" type="datetimeFigureOut">
               <a:rPr kumimoji="1" lang="ja-JP" altLang="en-US" smtClean="0"/>
-              <a:t>2026/5/20</a:t>
+              <a:t>2026/6/22</a:t>
             </a:fld>
             <a:endParaRPr kumimoji="1" lang="ja-JP" altLang="en-US"/>
           </a:p>
@@ -490,7 +490,7 @@
           <a:p>
             <a:fld id="{E9CC885B-4903-4D54-9A93-00025F12DED9}" type="datetimeFigureOut">
               <a:rPr kumimoji="1" lang="ja-JP" altLang="en-US" smtClean="0"/>
-              <a:t>2026/5/20</a:t>
+              <a:t>2026/6/22</a:t>
             </a:fld>
             <a:endParaRPr kumimoji="1" lang="ja-JP" altLang="en-US"/>
           </a:p>
@@ -730,7 +730,7 @@
           <a:p>
             <a:fld id="{E9CC885B-4903-4D54-9A93-00025F12DED9}" type="datetimeFigureOut">
               <a:rPr kumimoji="1" lang="ja-JP" altLang="en-US" smtClean="0"/>
-              <a:t>2026/5/20</a:t>
+              <a:t>2026/6/22</a:t>
             </a:fld>
             <a:endParaRPr kumimoji="1" lang="ja-JP" altLang="en-US"/>
           </a:p>
@@ -960,7 +960,7 @@
           <a:p>
             <a:fld id="{E9CC885B-4903-4D54-9A93-00025F12DED9}" type="datetimeFigureOut">
               <a:rPr kumimoji="1" lang="ja-JP" altLang="en-US" smtClean="0"/>
-              <a:t>2026/5/20</a:t>
+              <a:t>2026/6/22</a:t>
             </a:fld>
             <a:endParaRPr kumimoji="1" lang="ja-JP" altLang="en-US"/>
           </a:p>
@@ -1235,7 +1235,7 @@
           <a:p>
             <a:fld id="{E9CC885B-4903-4D54-9A93-00025F12DED9}" type="datetimeFigureOut">
               <a:rPr kumimoji="1" lang="ja-JP" altLang="en-US" smtClean="0"/>
-              <a:t>2026/5/20</a:t>
+              <a:t>2026/6/22</a:t>
             </a:fld>
             <a:endParaRPr kumimoji="1" lang="ja-JP" altLang="en-US"/>
           </a:p>
@@ -1564,7 +1564,7 @@
           <a:p>
             <a:fld id="{E9CC885B-4903-4D54-9A93-00025F12DED9}" type="datetimeFigureOut">
               <a:rPr kumimoji="1" lang="ja-JP" altLang="en-US" smtClean="0"/>
-              <a:t>2026/5/20</a:t>
+              <a:t>2026/6/22</a:t>
             </a:fld>
             <a:endParaRPr kumimoji="1" lang="ja-JP" altLang="en-US"/>
           </a:p>
@@ -2040,7 +2040,7 @@
           <a:p>
             <a:fld id="{E9CC885B-4903-4D54-9A93-00025F12DED9}" type="datetimeFigureOut">
               <a:rPr kumimoji="1" lang="ja-JP" altLang="en-US" smtClean="0"/>
-              <a:t>2026/5/20</a:t>
+              <a:t>2026/6/22</a:t>
             </a:fld>
             <a:endParaRPr kumimoji="1" lang="ja-JP" altLang="en-US"/>
           </a:p>
@@ -2181,7 +2181,7 @@
           <a:p>
             <a:fld id="{E9CC885B-4903-4D54-9A93-00025F12DED9}" type="datetimeFigureOut">
               <a:rPr kumimoji="1" lang="ja-JP" altLang="en-US" smtClean="0"/>
-              <a:t>2026/5/20</a:t>
+              <a:t>2026/6/22</a:t>
             </a:fld>
             <a:endParaRPr kumimoji="1" lang="ja-JP" altLang="en-US"/>
           </a:p>
@@ -2294,7 +2294,7 @@
           <a:p>
             <a:fld id="{E9CC885B-4903-4D54-9A93-00025F12DED9}" type="datetimeFigureOut">
               <a:rPr kumimoji="1" lang="ja-JP" altLang="en-US" smtClean="0"/>
-              <a:t>2026/5/20</a:t>
+              <a:t>2026/6/22</a:t>
             </a:fld>
             <a:endParaRPr kumimoji="1" lang="ja-JP" altLang="en-US"/>
           </a:p>
@@ -2637,7 +2637,7 @@
           <a:p>
             <a:fld id="{E9CC885B-4903-4D54-9A93-00025F12DED9}" type="datetimeFigureOut">
               <a:rPr kumimoji="1" lang="ja-JP" altLang="en-US" smtClean="0"/>
-              <a:t>2026/5/20</a:t>
+              <a:t>2026/6/22</a:t>
             </a:fld>
             <a:endParaRPr kumimoji="1" lang="ja-JP" altLang="en-US"/>
           </a:p>
@@ -2925,7 +2925,7 @@
           <a:p>
             <a:fld id="{E9CC885B-4903-4D54-9A93-00025F12DED9}" type="datetimeFigureOut">
               <a:rPr kumimoji="1" lang="ja-JP" altLang="en-US" smtClean="0"/>
-              <a:t>2026/5/20</a:t>
+              <a:t>2026/6/22</a:t>
             </a:fld>
             <a:endParaRPr kumimoji="1" lang="ja-JP" altLang="en-US"/>
           </a:p>
@@ -3198,7 +3198,7 @@
           <a:p>
             <a:fld id="{E9CC885B-4903-4D54-9A93-00025F12DED9}" type="datetimeFigureOut">
               <a:rPr kumimoji="1" lang="ja-JP" altLang="en-US" smtClean="0"/>
-              <a:t>2026/5/20</a:t>
+              <a:t>2026/6/22</a:t>
             </a:fld>
             <a:endParaRPr kumimoji="1" lang="ja-JP" altLang="en-US"/>
           </a:p>
@@ -3855,7 +3855,7 @@
         <p:spPr>
           <a:xfrm>
             <a:off x="567542" y="1216429"/>
-            <a:ext cx="10341293" cy="3046988"/>
+            <a:ext cx="10341293" cy="2308324"/>
           </a:xfrm>
           <a:prstGeom prst="rect">
             <a:avLst/>
@@ -3901,59 +3901,13 @@
           <a:p>
             <a:r>
               <a:rPr lang="ja-JP" altLang="en-US" sz="2400" dirty="0"/>
-              <a:t>過去のスライドを見直したりしましょう。</a:t>
+              <a:t>過去のスライドを見直したり</a:t>
+            </a:r>
+            <a:r>
+              <a:rPr lang="ja-JP" altLang="en-US" sz="2400"/>
+              <a:t>しましょう。</a:t>
             </a:r>
             <a:endParaRPr lang="en-US" altLang="ja-JP" sz="2400" dirty="0"/>
-          </a:p>
-          <a:p>
-            <a:endParaRPr lang="en-US" altLang="ja-JP" sz="2400" dirty="0"/>
-          </a:p>
-          <a:p>
-            <a:r>
-              <a:rPr lang="en-US" altLang="ja-JP" sz="2400" b="1" dirty="0">
-                <a:solidFill>
-                  <a:srgbClr val="FF0000"/>
-                </a:solidFill>
-              </a:rPr>
-              <a:t>※</a:t>
-            </a:r>
-            <a:r>
-              <a:rPr lang="en-US" altLang="ja-JP" sz="2400" b="1" dirty="0" err="1">
-                <a:solidFill>
-                  <a:srgbClr val="FF0000"/>
-                </a:solidFill>
-              </a:rPr>
-              <a:t>ChatGPT</a:t>
-            </a:r>
-            <a:r>
-              <a:rPr lang="ja-JP" altLang="en-US" sz="2400" b="1" dirty="0">
-                <a:solidFill>
-                  <a:srgbClr val="FF0000"/>
-                </a:solidFill>
-              </a:rPr>
-              <a:t>など</a:t>
-            </a:r>
-            <a:r>
-              <a:rPr lang="en-US" altLang="ja-JP" sz="2400" b="1" dirty="0">
-                <a:solidFill>
-                  <a:srgbClr val="FF0000"/>
-                </a:solidFill>
-              </a:rPr>
-              <a:t>AI</a:t>
-            </a:r>
-            <a:r>
-              <a:rPr lang="ja-JP" altLang="en-US" sz="2400" b="1" dirty="0">
-                <a:solidFill>
-                  <a:srgbClr val="FF0000"/>
-                </a:solidFill>
-              </a:rPr>
-              <a:t>には頼らないこと！！</a:t>
-            </a:r>
-            <a:endParaRPr lang="en-US" altLang="ja-JP" sz="2400" b="1" dirty="0">
-              <a:solidFill>
-                <a:srgbClr val="FF0000"/>
-              </a:solidFill>
-            </a:endParaRPr>
           </a:p>
         </p:txBody>
       </p:sp>
